--- a/Auriac_Rafael_1_presentation_112025.pptx
+++ b/Auriac_Rafael_1_presentation_112025.pptx
@@ -821,7 +821,7 @@
   <p:cSld>
     <p:spTree>
       <p:nvGrpSpPr>
-        <p:cNvPr id="185" name="Shape 185"/>
+        <p:cNvPr id="187" name="Shape 187"/>
         <p:cNvGrpSpPr/>
         <p:nvPr/>
       </p:nvGrpSpPr>
@@ -835,7 +835,7 @@
       </p:grpSpPr>
       <p:sp>
         <p:nvSpPr>
-          <p:cNvPr id="186" name="Google Shape;186;g39bc411db77_0_6:notes"/>
+          <p:cNvPr id="188" name="Google Shape;188;g39bc411db77_0_6:notes"/>
           <p:cNvSpPr/>
           <p:nvPr>
             <p:ph idx="2" type="sldImg"/>
@@ -870,7 +870,7 @@
       </p:sp>
       <p:sp>
         <p:nvSpPr>
-          <p:cNvPr id="187" name="Google Shape;187;g39bc411db77_0_6:notes"/>
+          <p:cNvPr id="189" name="Google Shape;189;g39bc411db77_0_6:notes"/>
           <p:cNvSpPr txBox="1"/>
           <p:nvPr>
             <p:ph idx="1" type="body"/>
@@ -920,7 +920,7 @@
   <p:cSld>
     <p:spTree>
       <p:nvGrpSpPr>
-        <p:cNvPr id="193" name="Shape 193"/>
+        <p:cNvPr id="195" name="Shape 195"/>
         <p:cNvGrpSpPr/>
         <p:nvPr/>
       </p:nvGrpSpPr>
@@ -934,7 +934,7 @@
       </p:grpSpPr>
       <p:sp>
         <p:nvSpPr>
-          <p:cNvPr id="194" name="Google Shape;194;g3a2090351f2_0_12:notes"/>
+          <p:cNvPr id="196" name="Google Shape;196;g3a2090351f2_0_12:notes"/>
           <p:cNvSpPr/>
           <p:nvPr>
             <p:ph idx="2" type="sldImg"/>
@@ -969,7 +969,7 @@
       </p:sp>
       <p:sp>
         <p:nvSpPr>
-          <p:cNvPr id="195" name="Google Shape;195;g3a2090351f2_0_12:notes"/>
+          <p:cNvPr id="197" name="Google Shape;197;g3a2090351f2_0_12:notes"/>
           <p:cNvSpPr txBox="1"/>
           <p:nvPr>
             <p:ph idx="1" type="body"/>
@@ -1019,7 +1019,7 @@
   <p:cSld>
     <p:spTree>
       <p:nvGrpSpPr>
-        <p:cNvPr id="201" name="Shape 201"/>
+        <p:cNvPr id="203" name="Shape 203"/>
         <p:cNvGrpSpPr/>
         <p:nvPr/>
       </p:nvGrpSpPr>
@@ -1033,7 +1033,7 @@
       </p:grpSpPr>
       <p:sp>
         <p:nvSpPr>
-          <p:cNvPr id="202" name="Google Shape;202;g3a2090351f2_0_19:notes"/>
+          <p:cNvPr id="204" name="Google Shape;204;g3a2090351f2_0_19:notes"/>
           <p:cNvSpPr/>
           <p:nvPr>
             <p:ph idx="2" type="sldImg"/>
@@ -1068,7 +1068,7 @@
       </p:sp>
       <p:sp>
         <p:nvSpPr>
-          <p:cNvPr id="203" name="Google Shape;203;g3a2090351f2_0_19:notes"/>
+          <p:cNvPr id="205" name="Google Shape;205;g3a2090351f2_0_19:notes"/>
           <p:cNvSpPr txBox="1"/>
           <p:nvPr>
             <p:ph idx="1" type="body"/>
@@ -1118,7 +1118,7 @@
   <p:cSld>
     <p:spTree>
       <p:nvGrpSpPr>
-        <p:cNvPr id="207" name="Shape 207"/>
+        <p:cNvPr id="209" name="Shape 209"/>
         <p:cNvGrpSpPr/>
         <p:nvPr/>
       </p:nvGrpSpPr>
@@ -1132,7 +1132,7 @@
       </p:grpSpPr>
       <p:sp>
         <p:nvSpPr>
-          <p:cNvPr id="208" name="Google Shape;208;g39bc411db77_0_13:notes"/>
+          <p:cNvPr id="210" name="Google Shape;210;g39bc411db77_0_13:notes"/>
           <p:cNvSpPr/>
           <p:nvPr>
             <p:ph idx="2" type="sldImg"/>
@@ -1167,7 +1167,7 @@
       </p:sp>
       <p:sp>
         <p:nvSpPr>
-          <p:cNvPr id="209" name="Google Shape;209;g39bc411db77_0_13:notes"/>
+          <p:cNvPr id="211" name="Google Shape;211;g39bc411db77_0_13:notes"/>
           <p:cNvSpPr txBox="1"/>
           <p:nvPr>
             <p:ph idx="1" type="body"/>
@@ -1217,7 +1217,7 @@
   <p:cSld>
     <p:spTree>
       <p:nvGrpSpPr>
-        <p:cNvPr id="214" name="Shape 214"/>
+        <p:cNvPr id="216" name="Shape 216"/>
         <p:cNvGrpSpPr/>
         <p:nvPr/>
       </p:nvGrpSpPr>
@@ -1231,7 +1231,7 @@
       </p:grpSpPr>
       <p:sp>
         <p:nvSpPr>
-          <p:cNvPr id="215" name="Google Shape;215;g39bc411db77_0_24:notes"/>
+          <p:cNvPr id="217" name="Google Shape;217;g39bc411db77_0_24:notes"/>
           <p:cNvSpPr/>
           <p:nvPr>
             <p:ph idx="2" type="sldImg"/>
@@ -1266,7 +1266,7 @@
       </p:sp>
       <p:sp>
         <p:nvSpPr>
-          <p:cNvPr id="216" name="Google Shape;216;g39bc411db77_0_24:notes"/>
+          <p:cNvPr id="218" name="Google Shape;218;g39bc411db77_0_24:notes"/>
           <p:cNvSpPr txBox="1"/>
           <p:nvPr>
             <p:ph idx="1" type="body"/>
@@ -1316,7 +1316,7 @@
   <p:cSld>
     <p:spTree>
       <p:nvGrpSpPr>
-        <p:cNvPr id="224" name="Shape 224"/>
+        <p:cNvPr id="226" name="Shape 226"/>
         <p:cNvGrpSpPr/>
         <p:nvPr/>
       </p:nvGrpSpPr>
@@ -1330,7 +1330,7 @@
       </p:grpSpPr>
       <p:sp>
         <p:nvSpPr>
-          <p:cNvPr id="225" name="Google Shape;225;g39bc411db77_0_39:notes"/>
+          <p:cNvPr id="227" name="Google Shape;227;g39bc411db77_0_39:notes"/>
           <p:cNvSpPr/>
           <p:nvPr>
             <p:ph idx="2" type="sldImg"/>
@@ -1365,7 +1365,7 @@
       </p:sp>
       <p:sp>
         <p:nvSpPr>
-          <p:cNvPr id="226" name="Google Shape;226;g39bc411db77_0_39:notes"/>
+          <p:cNvPr id="228" name="Google Shape;228;g39bc411db77_0_39:notes"/>
           <p:cNvSpPr txBox="1"/>
           <p:nvPr>
             <p:ph idx="1" type="body"/>
@@ -1415,7 +1415,7 @@
   <p:cSld>
     <p:spTree>
       <p:nvGrpSpPr>
-        <p:cNvPr id="229" name="Shape 229"/>
+        <p:cNvPr id="231" name="Shape 231"/>
         <p:cNvGrpSpPr/>
         <p:nvPr/>
       </p:nvGrpSpPr>
@@ -1429,7 +1429,7 @@
       </p:grpSpPr>
       <p:sp>
         <p:nvSpPr>
-          <p:cNvPr id="230" name="Google Shape;230;g39bc411db77_0_34:notes"/>
+          <p:cNvPr id="232" name="Google Shape;232;g39bc411db77_0_34:notes"/>
           <p:cNvSpPr/>
           <p:nvPr>
             <p:ph idx="2" type="sldImg"/>
@@ -1464,7 +1464,7 @@
       </p:sp>
       <p:sp>
         <p:nvSpPr>
-          <p:cNvPr id="231" name="Google Shape;231;g39bc411db77_0_34:notes"/>
+          <p:cNvPr id="233" name="Google Shape;233;g39bc411db77_0_34:notes"/>
           <p:cNvSpPr txBox="1"/>
           <p:nvPr>
             <p:ph idx="1" type="body"/>
@@ -1811,7 +1811,7 @@
   <p:cSld>
     <p:spTree>
       <p:nvGrpSpPr>
-        <p:cNvPr id="154" name="Shape 154"/>
+        <p:cNvPr id="156" name="Shape 156"/>
         <p:cNvGrpSpPr/>
         <p:nvPr/>
       </p:nvGrpSpPr>
@@ -1825,7 +1825,7 @@
       </p:grpSpPr>
       <p:sp>
         <p:nvSpPr>
-          <p:cNvPr id="155" name="Google Shape;155;g38c218990c3_0_274:notes"/>
+          <p:cNvPr id="157" name="Google Shape;157;g38c218990c3_0_274:notes"/>
           <p:cNvSpPr/>
           <p:nvPr>
             <p:ph idx="2" type="sldImg"/>
@@ -1860,7 +1860,7 @@
       </p:sp>
       <p:sp>
         <p:nvSpPr>
-          <p:cNvPr id="156" name="Google Shape;156;g38c218990c3_0_274:notes"/>
+          <p:cNvPr id="158" name="Google Shape;158;g38c218990c3_0_274:notes"/>
           <p:cNvSpPr txBox="1"/>
           <p:nvPr>
             <p:ph idx="1" type="body"/>
@@ -1910,7 +1910,7 @@
   <p:cSld>
     <p:spTree>
       <p:nvGrpSpPr>
-        <p:cNvPr id="160" name="Shape 160"/>
+        <p:cNvPr id="162" name="Shape 162"/>
         <p:cNvGrpSpPr/>
         <p:nvPr/>
       </p:nvGrpSpPr>
@@ -1924,7 +1924,7 @@
       </p:grpSpPr>
       <p:sp>
         <p:nvSpPr>
-          <p:cNvPr id="161" name="Google Shape;161;g39bc411db77_0_19:notes"/>
+          <p:cNvPr id="163" name="Google Shape;163;g39bc411db77_0_19:notes"/>
           <p:cNvSpPr/>
           <p:nvPr>
             <p:ph idx="2" type="sldImg"/>
@@ -1959,7 +1959,7 @@
       </p:sp>
       <p:sp>
         <p:nvSpPr>
-          <p:cNvPr id="162" name="Google Shape;162;g39bc411db77_0_19:notes"/>
+          <p:cNvPr id="164" name="Google Shape;164;g39bc411db77_0_19:notes"/>
           <p:cNvSpPr txBox="1"/>
           <p:nvPr>
             <p:ph idx="1" type="body"/>
@@ -2009,7 +2009,7 @@
   <p:cSld>
     <p:spTree>
       <p:nvGrpSpPr>
-        <p:cNvPr id="166" name="Shape 166"/>
+        <p:cNvPr id="168" name="Shape 168"/>
         <p:cNvGrpSpPr/>
         <p:nvPr/>
       </p:nvGrpSpPr>
@@ -2023,7 +2023,7 @@
       </p:grpSpPr>
       <p:sp>
         <p:nvSpPr>
-          <p:cNvPr id="167" name="Google Shape;167;g38c218990c3_0_286:notes"/>
+          <p:cNvPr id="169" name="Google Shape;169;g38c218990c3_0_286:notes"/>
           <p:cNvSpPr/>
           <p:nvPr>
             <p:ph idx="2" type="sldImg"/>
@@ -2058,7 +2058,7 @@
       </p:sp>
       <p:sp>
         <p:nvSpPr>
-          <p:cNvPr id="168" name="Google Shape;168;g38c218990c3_0_286:notes"/>
+          <p:cNvPr id="170" name="Google Shape;170;g38c218990c3_0_286:notes"/>
           <p:cNvSpPr txBox="1"/>
           <p:nvPr>
             <p:ph idx="1" type="body"/>
@@ -2108,7 +2108,7 @@
   <p:cSld>
     <p:spTree>
       <p:nvGrpSpPr>
-        <p:cNvPr id="173" name="Shape 173"/>
+        <p:cNvPr id="175" name="Shape 175"/>
         <p:cNvGrpSpPr/>
         <p:nvPr/>
       </p:nvGrpSpPr>
@@ -2122,7 +2122,7 @@
       </p:grpSpPr>
       <p:sp>
         <p:nvSpPr>
-          <p:cNvPr id="174" name="Google Shape;174;g38c218990c3_0_294:notes"/>
+          <p:cNvPr id="176" name="Google Shape;176;g38c218990c3_0_294:notes"/>
           <p:cNvSpPr/>
           <p:nvPr>
             <p:ph idx="2" type="sldImg"/>
@@ -2157,7 +2157,7 @@
       </p:sp>
       <p:sp>
         <p:nvSpPr>
-          <p:cNvPr id="175" name="Google Shape;175;g38c218990c3_0_294:notes"/>
+          <p:cNvPr id="177" name="Google Shape;177;g38c218990c3_0_294:notes"/>
           <p:cNvSpPr txBox="1"/>
           <p:nvPr>
             <p:ph idx="1" type="body"/>
@@ -2207,7 +2207,7 @@
   <p:cSld>
     <p:spTree>
       <p:nvGrpSpPr>
-        <p:cNvPr id="179" name="Shape 179"/>
+        <p:cNvPr id="181" name="Shape 181"/>
         <p:cNvGrpSpPr/>
         <p:nvPr/>
       </p:nvGrpSpPr>
@@ -2221,7 +2221,7 @@
       </p:grpSpPr>
       <p:sp>
         <p:nvSpPr>
-          <p:cNvPr id="180" name="Google Shape;180;g39bc411db77_0_0:notes"/>
+          <p:cNvPr id="182" name="Google Shape;182;g39bc411db77_0_0:notes"/>
           <p:cNvSpPr/>
           <p:nvPr>
             <p:ph idx="2" type="sldImg"/>
@@ -2256,7 +2256,7 @@
       </p:sp>
       <p:sp>
         <p:nvSpPr>
-          <p:cNvPr id="181" name="Google Shape;181;g39bc411db77_0_0:notes"/>
+          <p:cNvPr id="183" name="Google Shape;183;g39bc411db77_0_0:notes"/>
           <p:cNvSpPr txBox="1"/>
           <p:nvPr>
             <p:ph idx="1" type="body"/>
@@ -10512,7 +10512,7 @@
         <p:spPr>
           <a:xfrm>
             <a:off x="3537150" y="1578400"/>
-            <a:ext cx="5017500" cy="1578900"/>
+            <a:ext cx="5017500" cy="1839900"/>
           </a:xfrm>
           <a:prstGeom prst="rect">
             <a:avLst/>
@@ -10520,7 +10520,7 @@
         </p:spPr>
         <p:txBody>
           <a:bodyPr anchorCtr="0" anchor="t" bIns="91425" lIns="91425" spcFirstLastPara="1" rIns="91425" wrap="square" tIns="91425">
-            <a:normAutofit/>
+            <a:normAutofit fontScale="90000"/>
           </a:bodyPr>
           <a:lstStyle/>
           <a:p>
@@ -10534,7 +10534,8 @@
               <a:buNone/>
             </a:pPr>
             <a:r>
-              <a:t/>
+              <a:rPr lang="fr"/>
+              <a:t>Projet: Implémentez un modèle de scoring</a:t>
             </a:r>
             <a:endParaRPr/>
           </a:p>
@@ -10592,7 +10593,7 @@
   <p:cSld>
     <p:spTree>
       <p:nvGrpSpPr>
-        <p:cNvPr id="188" name="Shape 188"/>
+        <p:cNvPr id="190" name="Shape 190"/>
         <p:cNvGrpSpPr/>
         <p:nvPr/>
       </p:nvGrpSpPr>
@@ -10606,7 +10607,7 @@
       </p:grpSpPr>
       <p:sp>
         <p:nvSpPr>
-          <p:cNvPr id="189" name="Google Shape;189;p22"/>
+          <p:cNvPr id="191" name="Google Shape;191;p22"/>
           <p:cNvSpPr txBox="1"/>
           <p:nvPr>
             <p:ph type="title"/>
@@ -10646,7 +10647,7 @@
       </p:sp>
       <p:sp>
         <p:nvSpPr>
-          <p:cNvPr id="190" name="Google Shape;190;p22"/>
+          <p:cNvPr id="192" name="Google Shape;192;p22"/>
           <p:cNvSpPr txBox="1"/>
           <p:nvPr>
             <p:ph idx="1" type="body"/>
@@ -10694,7 +10695,7 @@
       </p:sp>
       <p:pic>
         <p:nvPicPr>
-          <p:cNvPr id="191" name="Google Shape;191;p22"/>
+          <p:cNvPr id="193" name="Google Shape;193;p22"/>
           <p:cNvPicPr preferRelativeResize="0"/>
           <p:nvPr/>
         </p:nvPicPr>
@@ -10722,7 +10723,7 @@
       </p:pic>
       <p:pic>
         <p:nvPicPr>
-          <p:cNvPr id="192" name="Google Shape;192;p22"/>
+          <p:cNvPr id="194" name="Google Shape;194;p22"/>
           <p:cNvPicPr preferRelativeResize="0"/>
           <p:nvPr/>
         </p:nvPicPr>
@@ -10761,7 +10762,7 @@
   <p:cSld>
     <p:spTree>
       <p:nvGrpSpPr>
-        <p:cNvPr id="196" name="Shape 196"/>
+        <p:cNvPr id="198" name="Shape 198"/>
         <p:cNvGrpSpPr/>
         <p:nvPr/>
       </p:nvGrpSpPr>
@@ -10775,7 +10776,7 @@
       </p:grpSpPr>
       <p:sp>
         <p:nvSpPr>
-          <p:cNvPr id="197" name="Google Shape;197;p23"/>
+          <p:cNvPr id="199" name="Google Shape;199;p23"/>
           <p:cNvSpPr txBox="1"/>
           <p:nvPr>
             <p:ph type="title"/>
@@ -10830,7 +10831,7 @@
       </p:sp>
       <p:sp>
         <p:nvSpPr>
-          <p:cNvPr id="198" name="Google Shape;198;p23"/>
+          <p:cNvPr id="200" name="Google Shape;200;p23"/>
           <p:cNvSpPr txBox="1"/>
           <p:nvPr>
             <p:ph idx="1" type="body"/>
@@ -10870,7 +10871,7 @@
       </p:sp>
       <p:pic>
         <p:nvPicPr>
-          <p:cNvPr id="199" name="Google Shape;199;p23"/>
+          <p:cNvPr id="201" name="Google Shape;201;p23"/>
           <p:cNvPicPr preferRelativeResize="0"/>
           <p:nvPr/>
         </p:nvPicPr>
@@ -10898,7 +10899,7 @@
       </p:pic>
       <p:pic>
         <p:nvPicPr>
-          <p:cNvPr id="200" name="Google Shape;200;p23"/>
+          <p:cNvPr id="202" name="Google Shape;202;p23"/>
           <p:cNvPicPr preferRelativeResize="0"/>
           <p:nvPr/>
         </p:nvPicPr>
@@ -10937,7 +10938,7 @@
   <p:cSld>
     <p:spTree>
       <p:nvGrpSpPr>
-        <p:cNvPr id="204" name="Shape 204"/>
+        <p:cNvPr id="206" name="Shape 206"/>
         <p:cNvGrpSpPr/>
         <p:nvPr/>
       </p:nvGrpSpPr>
@@ -10951,7 +10952,7 @@
       </p:grpSpPr>
       <p:sp>
         <p:nvSpPr>
-          <p:cNvPr id="205" name="Google Shape;205;p24"/>
+          <p:cNvPr id="207" name="Google Shape;207;p24"/>
           <p:cNvSpPr txBox="1"/>
           <p:nvPr>
             <p:ph type="title"/>
@@ -10983,7 +10984,7 @@
             </a:pPr>
             <a:r>
               <a:rPr lang="fr"/>
-              <a:t>Modélisation: interpretation</a:t>
+              <a:t>Modélisation: interprétation des resultats du dataset “Features polynomiales”</a:t>
             </a:r>
             <a:endParaRPr/>
           </a:p>
@@ -11021,7 +11022,7 @@
       </p:sp>
       <p:sp>
         <p:nvSpPr>
-          <p:cNvPr id="206" name="Google Shape;206;p24"/>
+          <p:cNvPr id="208" name="Google Shape;208;p24"/>
           <p:cNvSpPr txBox="1"/>
           <p:nvPr>
             <p:ph idx="1" type="body"/>
@@ -11088,7 +11089,7 @@
   <p:cSld>
     <p:spTree>
       <p:nvGrpSpPr>
-        <p:cNvPr id="210" name="Shape 210"/>
+        <p:cNvPr id="212" name="Shape 212"/>
         <p:cNvGrpSpPr/>
         <p:nvPr/>
       </p:nvGrpSpPr>
@@ -11102,7 +11103,7 @@
       </p:grpSpPr>
       <p:sp>
         <p:nvSpPr>
-          <p:cNvPr id="211" name="Google Shape;211;p25"/>
+          <p:cNvPr id="213" name="Google Shape;213;p25"/>
           <p:cNvSpPr txBox="1"/>
           <p:nvPr>
             <p:ph type="title"/>
@@ -11157,7 +11158,7 @@
       </p:sp>
       <p:sp>
         <p:nvSpPr>
-          <p:cNvPr id="212" name="Google Shape;212;p25"/>
+          <p:cNvPr id="214" name="Google Shape;214;p25"/>
           <p:cNvSpPr txBox="1"/>
           <p:nvPr>
             <p:ph idx="1" type="body"/>
@@ -11261,7 +11262,7 @@
       </p:sp>
       <p:pic>
         <p:nvPicPr>
-          <p:cNvPr id="213" name="Google Shape;213;p25"/>
+          <p:cNvPr id="215" name="Google Shape;215;p25"/>
           <p:cNvPicPr preferRelativeResize="0"/>
           <p:nvPr/>
         </p:nvPicPr>
@@ -11300,7 +11301,7 @@
   <p:cSld>
     <p:spTree>
       <p:nvGrpSpPr>
-        <p:cNvPr id="217" name="Shape 217"/>
+        <p:cNvPr id="219" name="Shape 219"/>
         <p:cNvGrpSpPr/>
         <p:nvPr/>
       </p:nvGrpSpPr>
@@ -11314,7 +11315,7 @@
       </p:grpSpPr>
       <p:sp>
         <p:nvSpPr>
-          <p:cNvPr id="218" name="Google Shape;218;p26"/>
+          <p:cNvPr id="220" name="Google Shape;220;p26"/>
           <p:cNvSpPr txBox="1"/>
           <p:nvPr>
             <p:ph type="title"/>
@@ -11354,7 +11355,7 @@
       </p:sp>
       <p:sp>
         <p:nvSpPr>
-          <p:cNvPr id="219" name="Google Shape;219;p26"/>
+          <p:cNvPr id="221" name="Google Shape;221;p26"/>
           <p:cNvSpPr txBox="1"/>
           <p:nvPr>
             <p:ph idx="1" type="body"/>
@@ -11395,7 +11396,7 @@
       </p:sp>
       <p:pic>
         <p:nvPicPr>
-          <p:cNvPr id="220" name="Google Shape;220;p26" title="flow.png"/>
+          <p:cNvPr id="222" name="Google Shape;222;p26" title="flow.png"/>
           <p:cNvPicPr preferRelativeResize="0"/>
           <p:nvPr/>
         </p:nvPicPr>
@@ -11423,7 +11424,7 @@
       </p:pic>
       <p:pic>
         <p:nvPicPr>
-          <p:cNvPr id="221" name="Google Shape;221;p26"/>
+          <p:cNvPr id="223" name="Google Shape;223;p26"/>
           <p:cNvPicPr preferRelativeResize="0"/>
           <p:nvPr/>
         </p:nvPicPr>
@@ -11451,7 +11452,7 @@
       </p:pic>
       <p:sp>
         <p:nvSpPr>
-          <p:cNvPr id="222" name="Google Shape;222;p26"/>
+          <p:cNvPr id="224" name="Google Shape;224;p26"/>
           <p:cNvSpPr txBox="1"/>
           <p:nvPr>
             <p:ph idx="1" type="body"/>
@@ -11500,7 +11501,7 @@
       </p:sp>
       <p:pic>
         <p:nvPicPr>
-          <p:cNvPr id="223" name="Google Shape;223;p26" title="flow.png"/>
+          <p:cNvPr id="225" name="Google Shape;225;p26" title="flow.png"/>
           <p:cNvPicPr preferRelativeResize="0"/>
           <p:nvPr/>
         </p:nvPicPr>
@@ -11539,7 +11540,7 @@
   <p:cSld>
     <p:spTree>
       <p:nvGrpSpPr>
-        <p:cNvPr id="227" name="Shape 227"/>
+        <p:cNvPr id="229" name="Shape 229"/>
         <p:cNvGrpSpPr/>
         <p:nvPr/>
       </p:nvGrpSpPr>
@@ -11553,7 +11554,7 @@
       </p:grpSpPr>
       <p:sp>
         <p:nvSpPr>
-          <p:cNvPr id="228" name="Google Shape;228;p27"/>
+          <p:cNvPr id="230" name="Google Shape;230;p27"/>
           <p:cNvSpPr txBox="1"/>
           <p:nvPr>
             <p:ph type="title"/>
@@ -11604,7 +11605,7 @@
   <p:cSld>
     <p:spTree>
       <p:nvGrpSpPr>
-        <p:cNvPr id="232" name="Shape 232"/>
+        <p:cNvPr id="234" name="Shape 234"/>
         <p:cNvGrpSpPr/>
         <p:nvPr/>
       </p:nvGrpSpPr>
@@ -11618,7 +11619,7 @@
       </p:grpSpPr>
       <p:sp>
         <p:nvSpPr>
-          <p:cNvPr id="233" name="Google Shape;233;p28"/>
+          <p:cNvPr id="235" name="Google Shape;235;p28"/>
           <p:cNvSpPr txBox="1"/>
           <p:nvPr>
             <p:ph type="title"/>
@@ -11658,7 +11659,7 @@
       </p:sp>
       <p:sp>
         <p:nvSpPr>
-          <p:cNvPr id="234" name="Google Shape;234;p28"/>
+          <p:cNvPr id="236" name="Google Shape;236;p28"/>
           <p:cNvSpPr txBox="1"/>
           <p:nvPr>
             <p:ph idx="1" type="body"/>
@@ -11675,7 +11676,7 @@
         </p:spPr>
         <p:txBody>
           <a:bodyPr anchorCtr="0" anchor="t" bIns="91425" lIns="91425" spcFirstLastPara="1" rIns="91425" wrap="square" tIns="91425">
-            <a:normAutofit/>
+            <a:normAutofit lnSpcReduction="10000"/>
           </a:bodyPr>
           <a:lstStyle/>
           <a:p>
@@ -11709,6 +11710,57 @@
             <a:r>
               <a:rPr lang="fr"/>
               <a:t>Tests de modèles avec les différents datasets, évaluations et investigations des résultats</a:t>
+            </a:r>
+            <a:endParaRPr/>
+          </a:p>
+          <a:p>
+            <a:pPr indent="-298450" lvl="1" marL="914400" rtl="0" algn="l">
+              <a:spcBef>
+                <a:spcPts val="0"/>
+              </a:spcBef>
+              <a:spcAft>
+                <a:spcPts val="0"/>
+              </a:spcAft>
+              <a:buSzPts val="1100"/>
+              <a:buChar char="-"/>
+            </a:pPr>
+            <a:r>
+              <a:rPr lang="fr"/>
+              <a:t>Amélioration de 21% avec redressement de la donnée</a:t>
+            </a:r>
+            <a:endParaRPr/>
+          </a:p>
+          <a:p>
+            <a:pPr indent="-298450" lvl="1" marL="914400" rtl="0" algn="l">
+              <a:spcBef>
+                <a:spcPts val="0"/>
+              </a:spcBef>
+              <a:spcAft>
+                <a:spcPts val="0"/>
+              </a:spcAft>
+              <a:buSzPts val="1100"/>
+              <a:buChar char="-"/>
+            </a:pPr>
+            <a:r>
+              <a:rPr lang="fr"/>
+              <a:t>Amélioration de 5% avec le dataset connaissance domaine</a:t>
+            </a:r>
+            <a:endParaRPr/>
+          </a:p>
+          <a:p>
+            <a:pPr indent="-298450" lvl="1" marL="914400" rtl="0" algn="l">
+              <a:spcBef>
+                <a:spcPts val="0"/>
+              </a:spcBef>
+              <a:spcAft>
+                <a:spcPts val="0"/>
+              </a:spcAft>
+              <a:buSzPts val="1100"/>
+              <a:buChar char="-"/>
+            </a:pPr>
+            <a:r>
+              <a:rPr lang="fr"/>
+              <a:t>Meilleur modèle 75% accuracy</a:t>
             </a:r>
             <a:endParaRPr/>
           </a:p>
@@ -12653,6 +12705,62 @@
           </a:p>
         </p:txBody>
       </p:sp>
+      <p:pic>
+        <p:nvPicPr>
+          <p:cNvPr id="154" name="Google Shape;154;p16"/>
+          <p:cNvPicPr preferRelativeResize="0"/>
+          <p:nvPr/>
+        </p:nvPicPr>
+        <p:blipFill>
+          <a:blip r:embed="rId3">
+            <a:alphaModFix/>
+          </a:blip>
+          <a:stretch>
+            <a:fillRect/>
+          </a:stretch>
+        </p:blipFill>
+        <p:spPr>
+          <a:xfrm>
+            <a:off x="3934600" y="3773250"/>
+            <a:ext cx="3260259" cy="885400"/>
+          </a:xfrm>
+          <a:prstGeom prst="rect">
+            <a:avLst/>
+          </a:prstGeom>
+          <a:noFill/>
+          <a:ln>
+            <a:noFill/>
+          </a:ln>
+        </p:spPr>
+      </p:pic>
+      <p:pic>
+        <p:nvPicPr>
+          <p:cNvPr id="155" name="Google Shape;155;p16"/>
+          <p:cNvPicPr preferRelativeResize="0"/>
+          <p:nvPr/>
+        </p:nvPicPr>
+        <p:blipFill>
+          <a:blip r:embed="rId4">
+            <a:alphaModFix/>
+          </a:blip>
+          <a:stretch>
+            <a:fillRect/>
+          </a:stretch>
+        </p:blipFill>
+        <p:spPr>
+          <a:xfrm>
+            <a:off x="1297502" y="3773250"/>
+            <a:ext cx="2437850" cy="885400"/>
+          </a:xfrm>
+          <a:prstGeom prst="rect">
+            <a:avLst/>
+          </a:prstGeom>
+          <a:noFill/>
+          <a:ln>
+            <a:noFill/>
+          </a:ln>
+        </p:spPr>
+      </p:pic>
     </p:spTree>
   </p:cSld>
   <p:clrMapOvr>
@@ -12666,7 +12774,7 @@
   <p:cSld>
     <p:spTree>
       <p:nvGrpSpPr>
-        <p:cNvPr id="157" name="Shape 157"/>
+        <p:cNvPr id="159" name="Shape 159"/>
         <p:cNvGrpSpPr/>
         <p:nvPr/>
       </p:nvGrpSpPr>
@@ -12680,7 +12788,7 @@
       </p:grpSpPr>
       <p:sp>
         <p:nvSpPr>
-          <p:cNvPr id="158" name="Google Shape;158;p17"/>
+          <p:cNvPr id="160" name="Google Shape;160;p17"/>
           <p:cNvSpPr txBox="1"/>
           <p:nvPr>
             <p:ph type="title"/>
@@ -12750,7 +12858,7 @@
       </p:sp>
       <p:sp>
         <p:nvSpPr>
-          <p:cNvPr id="159" name="Google Shape;159;p17"/>
+          <p:cNvPr id="161" name="Google Shape;161;p17"/>
           <p:cNvSpPr txBox="1"/>
           <p:nvPr>
             <p:ph idx="1" type="body"/>
@@ -12932,7 +13040,7 @@
   <p:cSld>
     <p:spTree>
       <p:nvGrpSpPr>
-        <p:cNvPr id="163" name="Shape 163"/>
+        <p:cNvPr id="165" name="Shape 165"/>
         <p:cNvGrpSpPr/>
         <p:nvPr/>
       </p:nvGrpSpPr>
@@ -12946,7 +13054,7 @@
       </p:grpSpPr>
       <p:sp>
         <p:nvSpPr>
-          <p:cNvPr id="164" name="Google Shape;164;p18"/>
+          <p:cNvPr id="166" name="Google Shape;166;p18"/>
           <p:cNvSpPr txBox="1"/>
           <p:nvPr>
             <p:ph type="title"/>
@@ -13031,7 +13139,7 @@
       </p:sp>
       <p:sp>
         <p:nvSpPr>
-          <p:cNvPr id="165" name="Google Shape;165;p18"/>
+          <p:cNvPr id="167" name="Google Shape;167;p18"/>
           <p:cNvSpPr txBox="1"/>
           <p:nvPr>
             <p:ph idx="1" type="body"/>
@@ -13184,7 +13292,7 @@
   <p:cSld>
     <p:spTree>
       <p:nvGrpSpPr>
-        <p:cNvPr id="169" name="Shape 169"/>
+        <p:cNvPr id="171" name="Shape 171"/>
         <p:cNvGrpSpPr/>
         <p:nvPr/>
       </p:nvGrpSpPr>
@@ -13198,7 +13306,7 @@
       </p:grpSpPr>
       <p:sp>
         <p:nvSpPr>
-          <p:cNvPr id="170" name="Google Shape;170;p19"/>
+          <p:cNvPr id="172" name="Google Shape;172;p19"/>
           <p:cNvSpPr txBox="1"/>
           <p:nvPr>
             <p:ph type="title"/>
@@ -13238,7 +13346,7 @@
       </p:sp>
       <p:sp>
         <p:nvSpPr>
-          <p:cNvPr id="171" name="Google Shape;171;p19"/>
+          <p:cNvPr id="173" name="Google Shape;173;p19"/>
           <p:cNvSpPr txBox="1"/>
           <p:nvPr>
             <p:ph idx="1" type="body"/>
@@ -13294,7 +13402,7 @@
       </p:sp>
       <p:pic>
         <p:nvPicPr>
-          <p:cNvPr id="172" name="Google Shape;172;p19"/>
+          <p:cNvPr id="174" name="Google Shape;174;p19"/>
           <p:cNvPicPr preferRelativeResize="0"/>
           <p:nvPr/>
         </p:nvPicPr>
@@ -13333,7 +13441,7 @@
   <p:cSld>
     <p:spTree>
       <p:nvGrpSpPr>
-        <p:cNvPr id="176" name="Shape 176"/>
+        <p:cNvPr id="178" name="Shape 178"/>
         <p:cNvGrpSpPr/>
         <p:nvPr/>
       </p:nvGrpSpPr>
@@ -13347,7 +13455,7 @@
       </p:grpSpPr>
       <p:sp>
         <p:nvSpPr>
-          <p:cNvPr id="177" name="Google Shape;177;p20"/>
+          <p:cNvPr id="179" name="Google Shape;179;p20"/>
           <p:cNvSpPr txBox="1"/>
           <p:nvPr>
             <p:ph type="title"/>
@@ -13387,7 +13495,7 @@
       </p:sp>
       <p:sp>
         <p:nvSpPr>
-          <p:cNvPr id="178" name="Google Shape;178;p20"/>
+          <p:cNvPr id="180" name="Google Shape;180;p20"/>
           <p:cNvSpPr txBox="1"/>
           <p:nvPr>
             <p:ph idx="1" type="body"/>
@@ -13404,7 +13512,7 @@
         </p:spPr>
         <p:txBody>
           <a:bodyPr anchorCtr="0" anchor="t" bIns="91425" lIns="91425" spcFirstLastPara="1" rIns="91425" wrap="square" tIns="91425">
-            <a:normAutofit fontScale="92500" lnSpcReduction="20000"/>
+            <a:normAutofit fontScale="85000" lnSpcReduction="20000"/>
           </a:bodyPr>
           <a:lstStyle/>
           <a:p>
@@ -13452,6 +13560,22 @@
             <a:r>
               <a:rPr lang="fr"/>
               <a:t>Pipeline: </a:t>
+            </a:r>
+            <a:endParaRPr/>
+          </a:p>
+          <a:p>
+            <a:pPr indent="0" lvl="0" marL="0" rtl="0" algn="l">
+              <a:spcBef>
+                <a:spcPts val="1200"/>
+              </a:spcBef>
+              <a:spcAft>
+                <a:spcPts val="0"/>
+              </a:spcAft>
+              <a:buNone/>
+            </a:pPr>
+            <a:r>
+              <a:rPr lang="fr"/>
+              <a:t>	-&gt; Gestion du data leakage avec SMOTE (score: 0.48 -&gt; 0.7)</a:t>
             </a:r>
             <a:endParaRPr/>
           </a:p>
@@ -13557,7 +13681,7 @@
   <p:cSld>
     <p:spTree>
       <p:nvGrpSpPr>
-        <p:cNvPr id="182" name="Shape 182"/>
+        <p:cNvPr id="184" name="Shape 184"/>
         <p:cNvGrpSpPr/>
         <p:nvPr/>
       </p:nvGrpSpPr>
@@ -13571,7 +13695,7 @@
       </p:grpSpPr>
       <p:sp>
         <p:nvSpPr>
-          <p:cNvPr id="183" name="Google Shape;183;p21"/>
+          <p:cNvPr id="185" name="Google Shape;185;p21"/>
           <p:cNvSpPr txBox="1"/>
           <p:nvPr>
             <p:ph type="title"/>
@@ -13611,12 +13735,12 @@
       </p:sp>
       <p:graphicFrame>
         <p:nvGraphicFramePr>
-          <p:cNvPr id="184" name="Google Shape;184;p21"/>
+          <p:cNvPr id="186" name="Google Shape;186;p21"/>
           <p:cNvGraphicFramePr/>
           <p:nvPr/>
         </p:nvGraphicFramePr>
         <p:xfrm>
-          <a:off x="1097400" y="1903875"/>
+          <a:off x="660375" y="1903875"/>
           <a:ext cx="3000000" cy="3000000"/>
         </p:xfrm>
         <a:graphic>
@@ -13624,13 +13748,14 @@
             <a:tbl>
               <a:tblPr>
                 <a:noFill/>
-                <a:tableStyleId>{B89DA66E-F209-4446-BEC5-7B6D94F0EA4C}</a:tableStyleId>
+                <a:tableStyleId>{53FE850D-206B-41DC-A1DF-70CD1E17F551}</a:tableStyleId>
               </a:tblPr>
               <a:tblGrid>
-                <a:gridCol w="2636750"/>
-                <a:gridCol w="1413050"/>
-                <a:gridCol w="1634950"/>
-                <a:gridCol w="1554250"/>
+                <a:gridCol w="2765975"/>
+                <a:gridCol w="1340575"/>
+                <a:gridCol w="1092325"/>
+                <a:gridCol w="1269925"/>
+                <a:gridCol w="1550125"/>
               </a:tblGrid>
               <a:tr h="829650">
                 <a:tc>
@@ -13654,6 +13779,61 @@
                           </a:solidFill>
                         </a:rPr>
                         <a:t>AUC (validation)</a:t>
+                      </a:r>
+                      <a:endParaRPr>
+                        <a:solidFill>
+                          <a:schemeClr val="lt1"/>
+                        </a:solidFill>
+                      </a:endParaRPr>
+                    </a:p>
+                  </a:txBody>
+                  <a:tcPr marT="91425" marB="91425" marR="91425" marL="91425"/>
+                </a:tc>
+                <a:tc>
+                  <a:txBody>
+                    <a:bodyPr/>
+                    <a:lstStyle/>
+                    <a:p>
+                      <a:pPr indent="0" lvl="0" marL="0" rtl="0" algn="l">
+                        <a:spcBef>
+                          <a:spcPts val="0"/>
+                        </a:spcBef>
+                        <a:spcAft>
+                          <a:spcPts val="0"/>
+                        </a:spcAft>
+                        <a:buNone/>
+                      </a:pPr>
+                      <a:r>
+                        <a:rPr lang="fr">
+                          <a:solidFill>
+                            <a:schemeClr val="lt1"/>
+                          </a:solidFill>
+                        </a:rPr>
+                        <a:t>Modèle</a:t>
+                      </a:r>
+                      <a:r>
+                        <a:rPr lang="fr">
+                          <a:solidFill>
+                            <a:schemeClr val="lt1"/>
+                          </a:solidFill>
+                        </a:rPr>
+                        <a:t> </a:t>
+                      </a:r>
+                      <a:r>
+                        <a:rPr lang="fr">
+                          <a:solidFill>
+                            <a:schemeClr val="lt1"/>
+                          </a:solidFill>
+                        </a:rPr>
+                        <a:t>original du </a:t>
+                      </a:r>
+                      <a:r>
+                        <a:rPr lang="fr">
+                          <a:solidFill>
+                            <a:schemeClr val="lt1"/>
+                          </a:solidFill>
+                        </a:rPr>
+                        <a:t>notebook </a:t>
                       </a:r>
                       <a:endParaRPr>
                         <a:solidFill>
@@ -13880,6 +14060,37 @@
                             <a:schemeClr val="lt1"/>
                           </a:solidFill>
                         </a:rPr>
+                        <a:t>0.69</a:t>
+                      </a:r>
+                      <a:endParaRPr>
+                        <a:solidFill>
+                          <a:schemeClr val="lt1"/>
+                        </a:solidFill>
+                      </a:endParaRPr>
+                    </a:p>
+                  </a:txBody>
+                  <a:tcPr marT="91425" marB="91425" marR="91425" marL="91425"/>
+                </a:tc>
+                <a:tc>
+                  <a:txBody>
+                    <a:bodyPr/>
+                    <a:lstStyle/>
+                    <a:p>
+                      <a:pPr indent="0" lvl="0" marL="0" rtl="0" algn="ctr">
+                        <a:spcBef>
+                          <a:spcPts val="0"/>
+                        </a:spcBef>
+                        <a:spcAft>
+                          <a:spcPts val="0"/>
+                        </a:spcAft>
+                        <a:buNone/>
+                      </a:pPr>
+                      <a:r>
+                        <a:rPr lang="fr">
+                          <a:solidFill>
+                            <a:schemeClr val="lt1"/>
+                          </a:solidFill>
+                        </a:rPr>
                         <a:t>0.75</a:t>
                       </a:r>
                       <a:endParaRPr>
@@ -13976,6 +14187,37 @@
                           </a:solidFill>
                         </a:rPr>
                         <a:t>RandomForest</a:t>
+                      </a:r>
+                      <a:endParaRPr>
+                        <a:solidFill>
+                          <a:schemeClr val="lt1"/>
+                        </a:solidFill>
+                      </a:endParaRPr>
+                    </a:p>
+                  </a:txBody>
+                  <a:tcPr marT="91425" marB="91425" marR="91425" marL="91425"/>
+                </a:tc>
+                <a:tc>
+                  <a:txBody>
+                    <a:bodyPr/>
+                    <a:lstStyle/>
+                    <a:p>
+                      <a:pPr indent="0" lvl="0" marL="0" rtl="0" algn="ctr">
+                        <a:spcBef>
+                          <a:spcPts val="0"/>
+                        </a:spcBef>
+                        <a:spcAft>
+                          <a:spcPts val="0"/>
+                        </a:spcAft>
+                        <a:buNone/>
+                      </a:pPr>
+                      <a:r>
+                        <a:rPr lang="fr">
+                          <a:solidFill>
+                            <a:schemeClr val="lt1"/>
+                          </a:solidFill>
+                        </a:rPr>
+                        <a:t>0.67</a:t>
                       </a:r>
                       <a:endParaRPr>
                         <a:solidFill>
